--- a/public/materialy/1L/6/Prezentace k hodinám/4. Úprava fotografie v GIMPu.pptx
+++ b/public/materialy/1L/6/Prezentace k hodinám/4. Úprava fotografie v GIMPu.pptx
@@ -513,7 +513,7 @@
           </a:p>
           <a:p>
             <a:r>
-              <a:t>Soubory: GIMP, obrazky/foto_original.png, 05. Úprava obrázku v GIMPu.txt</a:t>
+              <a:t>Soubory: GIMP, Obrázky/foto_original.png, 05. Úprava obrázku v GIMPu.txt</a:t>
             </a:r>
           </a:p>
           <a:p>
@@ -758,7 +758,7 @@
           </a:p>
           <a:p>
             <a:r>
-              <a:t>Soubory: GIMP, obrazky/foto_original.png, 05. Úprava obrázku v GIMPu.txt</a:t>
+              <a:t>Soubory: GIMP, Obrázky/foto_original.png, 05. Úprava obrázku v GIMPu.txt</a:t>
             </a:r>
           </a:p>
           <a:p>
@@ -6036,7 +6036,7 @@
                 </a:solidFill>
                 <a:latin typeface="Calibri"/>
               </a:rPr>
-              <a:t>GIMP, obrazky/foto_original.png, 05. Úprava obrázku v GIMPu.txt</a:t>
+              <a:t>GIMP, Obrázky/foto_original.png, 05. Úprava obrázku v GIMPu.txt</a:t>
             </a:r>
           </a:p>
         </p:txBody>

--- a/public/materialy/1L/6/Prezentace k hodinám/4. Úprava fotografie v GIMPu.pptx
+++ b/public/materialy/1L/6/Prezentace k hodinám/4. Úprava fotografie v GIMPu.pptx
@@ -508,17 +508,61 @@
           <a:lstStyle/>
           <a:p>
             <a:r>
-              <a:t>Cíl hodiny: Student provede základní úpravy rastrového snímku, pracuje s vrstvami a exportuje výstup ve vhodném formátu a velikosti.</a:t>
-            </a:r>
-          </a:p>
-          <a:p>
-            <a:r>
-              <a:t>Soubory: GIMP, Obrázky/foto_original.png, Úprava obrázku v GIMPu.txt</a:t>
-            </a:r>
-          </a:p>
-          <a:p>
-            <a:r>
-              <a:t>Výstup: Soubor uprava.xcf, tři exporty a tabulka s rozměry, velikostmi a účelem.</a:t>
+              <a:t>NEŽ ZAZVONÍ</a:t>
+            </a:r>
+          </a:p>
+          <a:p>
+            <a:r>
+              <a:t>Ověř, že GIMP je na všech stanicích a spustí se. První spuštění trvá dlouho, ať to nekrade čas z hodiny.</a:t>
+            </a:r>
+          </a:p>
+          <a:p>
+            <a:r>
+              <a:t>Rozbal Obrázky.zip a rozdej Úprava obrázku v GIMPu.txt. Soubor foto_original.png musí mít každý ve své vlastní kopii.</a:t>
+            </a:r>
+          </a:p>
+          <a:p/>
+          <a:p>
+            <a:r>
+              <a:t>KDYŽ GIMP NENÍ</a:t>
+            </a:r>
+          </a:p>
+          <a:p>
+            <a:r>
+              <a:t>Veď hodinu jako řízenou demonstraci na projektoru a studenti zapisují postup a rozhodnutí do sešitu — tak to má i metodika. Ukázat se musí obojí: panel vrstev a rozdíl mezi uložením .xcf a exportem .jpg.</a:t>
+            </a:r>
+          </a:p>
+          <a:p/>
+          <a:p>
+            <a:r>
+              <a:t>CÍL HODINY</a:t>
+            </a:r>
+          </a:p>
+          <a:p>
+            <a:r>
+              <a:t>Student provede základní úpravy rastrového snímku, pracuje s vrstvami a exportuje výstup ve vhodném formátu a velikosti.</a:t>
+            </a:r>
+          </a:p>
+          <a:p/>
+          <a:p>
+            <a:r>
+              <a:t>VÝSTUP, KTERÝ VYBÍRÁŠ</a:t>
+            </a:r>
+          </a:p>
+          <a:p>
+            <a:r>
+              <a:t>Soubor uprava.xcf, tři exporty a tabulka s rozměry, velikostmi a účelem.</a:t>
+            </a:r>
+          </a:p>
+          <a:p/>
+          <a:p>
+            <a:r>
+              <a:t>ROZVRŽENÍ</a:t>
+            </a:r>
+          </a:p>
+          <a:p>
+            <a:r>
+              <a:t>5 min otázka · 7 min ukázka · 28 min práce · 5 min rozbor a exit ticket.</a:t>
             </a:r>
           </a:p>
         </p:txBody>
@@ -591,14 +635,42 @@
               <a:t>Čas: 0–5 minut.</a:t>
             </a:r>
           </a:p>
-          <a:p>
-            <a:r>
-              <a:t>Otázka pro studenty: Proč se v grafických programech ukládá pracovní soubor zvlášť od výsledného obrázku?</a:t>
-            </a:r>
-          </a:p>
-          <a:p>
-            <a:r>
-              <a:t>Postup: nech studenty rozhodnout a zapsat důvod dřív, než ukážeš řešení. Neprozrazuj správnou odpověď.</a:t>
+          <a:p/>
+          <a:p>
+            <a:r>
+              <a:t>CO ŘEKNEŠ</a:t>
+            </a:r>
+          </a:p>
+          <a:p>
+            <a:r>
+              <a:t>„Každý grafický program vás nutí ukládat dva soubory: pracovní a výsledný. Proč? Napište si jednu vlastnost, o kterou přijdete, když uložíte rovnou do JPEG.“</a:t>
+            </a:r>
+          </a:p>
+          <a:p/>
+          <a:p>
+            <a:r>
+              <a:t>CO DĚLÁŠ</a:t>
+            </a:r>
+          </a:p>
+          <a:p>
+            <a:r>
+              <a:t>Nechej odpovědi zapsané a nekomentuj je. Na konci hodiny si je studenti sami zkontrolují — do té doby si na ztrátu vrstev sáhnou.</a:t>
+            </a:r>
+          </a:p>
+          <a:p>
+            <a:r>
+              <a:t>Kdo napíše „kvalitu“, má pravdu jen z poloviny. Hlavní ztráta je, že se vrstvy slijí do jednoho obrazu.</a:t>
+            </a:r>
+          </a:p>
+          <a:p/>
+          <a:p>
+            <a:r>
+              <a:t>POZOR</a:t>
+            </a:r>
+          </a:p>
+          <a:p>
+            <a:r>
+              <a:t>Neodpovídej. Tahle hodina má jedinou skutečnou pointu a ta se musí ukázat, ne říct.</a:t>
             </a:r>
           </a:p>
         </p:txBody>
@@ -668,22 +740,55 @@
           <a:lstStyle/>
           <a:p>
             <a:r>
-              <a:t>Čas: 5–12 minut.</a:t>
-            </a:r>
-          </a:p>
-          <a:p>
-            <a:r>
-              <a:t>Klíčové pojmy: Vrstvy · Nedestruktivní postup · Export</a:t>
-            </a:r>
-          </a:p>
-          <a:p>
-            <a:r>
-              <a:t>Původní soubor nikdy nepřepisuj. Uprav kopii.</a:t>
-            </a:r>
-          </a:p>
-          <a:p>
-            <a:r>
-              <a:t>Postup: vysvětli stručně, ověř porozuměním otázkou, nepřednášej déle než 7 minut.</a:t>
+              <a:t>Čas: 5–12 minut. Sedm minut je strop a část z nich ukazuj přímo v GIMPu na projektoru.</a:t>
+            </a:r>
+          </a:p>
+          <a:p/>
+          <a:p>
+            <a:r>
+              <a:t>CO ŘEKNEŠ</a:t>
+            </a:r>
+          </a:p>
+          <a:p>
+            <a:r>
+              <a:t>K bodu 01: „Vrstvy si představte jako průhledné fólie položené na sebe. Text je na jedné, fotka na druhé. Dokud jsou oddělené, můžete kteroukoli z nich posunout nebo smazat, aniž byste sáhli na ostatní.“</a:t>
+            </a:r>
+          </a:p>
+          <a:p>
+            <a:r>
+              <a:t>K bodu 02: „Pracovní soubor .xcf si ty fólie pamatuje. Export do JPEG je slije do jednoho obrazu — a to je jednosměrná cesta. Z JPEGu vrstvy nikdo nevytáhne.“</a:t>
+            </a:r>
+          </a:p>
+          <a:p>
+            <a:r>
+              <a:t>K bodu 03: „Export není ukládání. Je to rozhodnutí, kam obrázek půjde: jaký formát, jaký rozměr, jaká kvalita.“</a:t>
+            </a:r>
+          </a:p>
+          <a:p>
+            <a:r>
+              <a:t>Závěr: „A jedno pravidlo, které platí ve všech programech: původní soubor nikdy nepřepisujte. Upravujte kopii.“</a:t>
+            </a:r>
+          </a:p>
+          <a:p/>
+          <a:p>
+            <a:r>
+              <a:t>CO DĚLÁŠ</a:t>
+            </a:r>
+          </a:p>
+          <a:p>
+            <a:r>
+              <a:t>Ukaž na projektoru dvě věci a nic víc: jak vypadá panel vrstev, a kde je rozdíl mezi Uložit jako (.xcf) a Exportovat jako (.jpg). Právě tohle studenti nejčastěji spletou.</a:t>
+            </a:r>
+          </a:p>
+          <a:p/>
+          <a:p>
+            <a:r>
+              <a:t>POZOR</a:t>
+            </a:r>
+          </a:p>
+          <a:p>
+            <a:r>
+              <a:t>Neuč GIMP jako program. Nástroje najdou sami, hodina je o postupu — nedestruktivní práce a vědomý export.</a:t>
             </a:r>
           </a:p>
         </p:txBody>
@@ -753,32 +858,88 @@
           <a:lstStyle/>
           <a:p>
             <a:r>
-              <a:t>Čas: 12–40 minut.</a:t>
-            </a:r>
-          </a:p>
-          <a:p>
-            <a:r>
-              <a:t>Soubory: GIMP, Obrázky/foto_original.png, Úprava obrázku v GIMPu.txt</a:t>
-            </a:r>
-          </a:p>
-          <a:p>
-            <a:r>
-              <a:t>12–20 min – ořez a tonální úprava; hlídej, aby nepřepisovali originál.</a:t>
-            </a:r>
-          </a:p>
-          <a:p>
-            <a:r>
-              <a:t>20–30 min – textová vrstva a uložení .xcf.</a:t>
-            </a:r>
-          </a:p>
-          <a:p>
-            <a:r>
-              <a:t>30–40 min – tři exporty a zápis velikostí; ptej se, který kam patří.</a:t>
-            </a:r>
-          </a:p>
-          <a:p>
-            <a:r>
-              <a:t>Výstup: Soubor uprava.xcf, tři exporty a tabulka s rozměry, velikostmi a účelem.</a:t>
+              <a:t>Čas: 12–40 minut. Nejvíc dotazů přijde v prvních pěti minutách, počítej s tím.</a:t>
+            </a:r>
+          </a:p>
+          <a:p/>
+          <a:p>
+            <a:r>
+              <a:t>CO ŘEKNEŠ</a:t>
+            </a:r>
+          </a:p>
+          <a:p>
+            <a:r>
+              <a:t>„Otevřete si svou kopii foto_original.png a pracovní list. Postup je v něm krok za krokem. Do dvaceti minut chci mít ořez a jas, pak jdeme na text.“</a:t>
+            </a:r>
+          </a:p>
+          <a:p/>
+          <a:p>
+            <a:r>
+              <a:t>12–20 MIN · OŘEZ A TONÁLNÍ ÚPRAVA</a:t>
+            </a:r>
+          </a:p>
+          <a:p>
+            <a:r>
+              <a:t>Ořez na poměr 16:9 a úprava jasu a kontrastu. Trvej na tom, aby si zapsali použité hodnoty — bez toho se úprava nedá zopakovat ani obhájit.</a:t>
+            </a:r>
+          </a:p>
+          <a:p>
+            <a:r>
+              <a:t>Obcházej a hlídej jedinou věc: jestli někdo nepřepisuje originál. Kdo to udělá, dostane novou kopii ze ZIPu a je to dobrá připomínka, ne trest.</a:t>
+            </a:r>
+          </a:p>
+          <a:p/>
+          <a:p>
+            <a:r>
+              <a:t>20–30 MIN · TEXTOVÁ VRSTVA A ULOŽENÍ .XCF</a:t>
+            </a:r>
+          </a:p>
+          <a:p>
+            <a:r>
+              <a:t>Přidají textovou vrstvu a uloží pracovní verzi jako uprava.xcf.</a:t>
+            </a:r>
+          </a:p>
+          <a:p>
+            <a:r>
+              <a:t>Tady se odehraje pointa hodiny. Až budou mít .xcf, řekni: „Teď zavřete GIMP, otevřete svůj export a zkuste ten text posunout.“ Nejde to. Otevřou .xcf a jde to. Nechej to chvíli působit.</a:t>
+            </a:r>
+          </a:p>
+          <a:p/>
+          <a:p>
+            <a:r>
+              <a:t>30–40 MIN · TŘI EXPORTY</a:t>
+            </a:r>
+          </a:p>
+          <a:p>
+            <a:r>
+              <a:t>export_web.jpg, export_tisk.png a export_maly.jpg podle zadání. U každého zapíšou rozměry v pixelech, velikost v kB a účel.</a:t>
+            </a:r>
+          </a:p>
+          <a:p>
+            <a:r>
+              <a:t>Ptej se u tabule: „Který z těch tří pošleš do časopisu a který na web školy?“ Ať zdůvodní účelem, ne velikostí.</a:t>
+            </a:r>
+          </a:p>
+          <a:p/>
+          <a:p>
+            <a:r>
+              <a:t>VÝSTUP</a:t>
+            </a:r>
+          </a:p>
+          <a:p>
+            <a:r>
+              <a:t>Soubor uprava.xcf, tři exporty a tabulka s rozměry, velikostmi a účelem.</a:t>
+            </a:r>
+          </a:p>
+          <a:p/>
+          <a:p>
+            <a:r>
+              <a:t>KDYŽ NENÍ ČAS</a:t>
+            </a:r>
+          </a:p>
+          <a:p>
+            <a:r>
+              <a:t>Vynech export_maly.jpg. Dvojice web a tisk stačí na to, aby byl rozdíl vidět.</a:t>
             </a:r>
           </a:p>
         </p:txBody>
@@ -848,27 +1009,40 @@
           <a:lstStyle/>
           <a:p>
             <a:r>
-              <a:t>Průběžná kontrola. Projdi body nahlas, studenti si odškrtávají v sešitu.</a:t>
-            </a:r>
-          </a:p>
-          <a:p>
-            <a:r>
-              <a:t>• Původní foto_original.png je nezměněné.</a:t>
-            </a:r>
-          </a:p>
-          <a:p>
-            <a:r>
-              <a:t>• Máš uložený pracovní soubor .xcf s vrstvami.</a:t>
-            </a:r>
-          </a:p>
-          <a:p>
-            <a:r>
-              <a:t>• U všech tří exportů máš zapsané rozměry a velikost v kB.</a:t>
-            </a:r>
-          </a:p>
-          <a:p>
-            <a:r>
-              <a:t>• Umíš říct, co se stalo s vrstvami při exportu do JPEG.</a:t>
+              <a:t>Průběžná kontrola, zhruba 38. minuta.</a:t>
+            </a:r>
+          </a:p>
+          <a:p/>
+          <a:p>
+            <a:r>
+              <a:t>CO ŘEKNEŠ</a:t>
+            </a:r>
+          </a:p>
+          <a:p>
+            <a:r>
+              <a:t>„Než odevzdáte, projedeme čtyři věci. Odškrtávejte si je.“ Čti body nahlas a mezi nimi nech pauzu.</a:t>
+            </a:r>
+          </a:p>
+          <a:p/>
+          <a:p>
+            <a:r>
+              <a:t>CO DĚLÁŠ</a:t>
+            </a:r>
+          </a:p>
+          <a:p>
+            <a:r>
+              <a:t>První bod ověř namátkou sám: otevři dvěma studentům složku a podívej se na datum změny u foto_original.png. Přepsaný originál je nejčastější chyba téhle hodiny.</a:t>
+            </a:r>
+          </a:p>
+          <a:p/>
+          <a:p>
+            <a:r>
+              <a:t>POZOR</a:t>
+            </a:r>
+          </a:p>
+          <a:p>
+            <a:r>
+              <a:t>Není to známkování, je to poslední šance práci dodělat.</a:t>
             </a:r>
           </a:p>
         </p:txBody>
@@ -938,32 +1112,65 @@
           <a:lstStyle/>
           <a:p>
             <a:r>
-              <a:t>Společný rozbor – očekávané závěry:</a:t>
-            </a:r>
-          </a:p>
-          <a:p>
-            <a:r>
-              <a:t>Vrstvy: Umožňují vracet se k rozhodnutím. Export je slije do jednoho obrazu.</a:t>
-            </a:r>
-          </a:p>
-          <a:p>
-            <a:r>
-              <a:t>Formát podle cíle: Web snese menší rozměr a JPEG. Tisk potřebuje plnou velikost.</a:t>
-            </a:r>
-          </a:p>
-          <a:p>
-            <a:r>
-              <a:t>Ztráta je trvalá: Z exportovaného JPEG už vrstvy ani ztracený detail nezískáš.</a:t>
-            </a:r>
-          </a:p>
-          <a:p>
-            <a:r>
-              <a:t>Pracovní kopie: Vždy uprav duplikát; originál je jediný zdroj plné kvality.</a:t>
-            </a:r>
-          </a:p>
-          <a:p>
-            <a:r>
-              <a:t>Hodnoť postup a zdůvodnění, ne shodu s jednou formulací.</a:t>
+              <a:t>Společný rozbor, 40–43 minut.</a:t>
+            </a:r>
+          </a:p>
+          <a:p/>
+          <a:p>
+            <a:r>
+              <a:t>CO ŘEKNEŠ</a:t>
+            </a:r>
+          </a:p>
+          <a:p>
+            <a:r>
+              <a:t>Vrať se k úvodní otázce: „Na začátku jste psali, o co přijdete při uložení do JPEG. Kdo to má napsané správně?“</a:t>
+            </a:r>
+          </a:p>
+          <a:p>
+            <a:r>
+              <a:t>Očekávaná odpověď je „o vrstvy“, ne jen „o kvalitu“. Kdo napsal kvalitu, má pravdu z poloviny.</a:t>
+            </a:r>
+          </a:p>
+          <a:p>
+            <a:r>
+              <a:t>Pak nech studenty vyslovit čtyři závěry ze snímku a doplň jen to, co nezazní.</a:t>
+            </a:r>
+          </a:p>
+          <a:p/>
+          <a:p>
+            <a:r>
+              <a:t>OČEKÁVANÉ ZÁVĚRY</a:t>
+            </a:r>
+          </a:p>
+          <a:p>
+            <a:r>
+              <a:t>Vrstvy: umožňují vracet se k rozhodnutím. Export je slije do jednoho obrazu.</a:t>
+            </a:r>
+          </a:p>
+          <a:p>
+            <a:r>
+              <a:t>Formát podle cíle: web snese menší rozměr a JPEG, tisk potřebuje plnou velikost.</a:t>
+            </a:r>
+          </a:p>
+          <a:p>
+            <a:r>
+              <a:t>Ztráta je trvalá: z exportovaného JPEGu vrstvy ani ztracený detail nezískáš.</a:t>
+            </a:r>
+          </a:p>
+          <a:p>
+            <a:r>
+              <a:t>Pracovní kopie: vždy upravuj duplikát, originál je jediný zdroj plné kvality.</a:t>
+            </a:r>
+          </a:p>
+          <a:p/>
+          <a:p>
+            <a:r>
+              <a:t>POZOR</a:t>
+            </a:r>
+          </a:p>
+          <a:p>
+            <a:r>
+              <a:t>Hodnoť postup a zdůvodnění, ne shodu s jednou formulací. Krásná fotka s přepsaným originálem je horší výsledek než průměrná úprava s čistým postupem.</a:t>
             </a:r>
           </a:p>
         </p:txBody>
@@ -1033,17 +1240,45 @@
           <a:lstStyle/>
           <a:p>
             <a:r>
-              <a:t>Exit ticket: Který ze svých tří exportů bys poslal do školního časopisu a proč právě ten?</a:t>
-            </a:r>
-          </a:p>
-          <a:p>
-            <a:r>
-              <a:t>Sbírej individuálně. Slouží jako doklad o učení každého studenta.</a:t>
-            </a:r>
-          </a:p>
-          <a:p>
-            <a:r>
-              <a:t>Očekávaná odpověď: Očekává se export s dostatečným rozlišením a nízkou kompresí; zdůvodnění účelem, ne velikostí souboru.</a:t>
+              <a:t>Exit ticket, poslední dvě minuty.</a:t>
+            </a:r>
+          </a:p>
+          <a:p/>
+          <a:p>
+            <a:r>
+              <a:t>CO ŘEKNEŠ</a:t>
+            </a:r>
+          </a:p>
+          <a:p>
+            <a:r>
+              <a:t>„Každý sám, jedna dvě věty. Který ze svých tří exportů bys poslal do školního časopisu a proč právě ten?“</a:t>
+            </a:r>
+          </a:p>
+          <a:p/>
+          <a:p>
+            <a:r>
+              <a:t>CO DĚLÁŠ</a:t>
+            </a:r>
+          </a:p>
+          <a:p>
+            <a:r>
+              <a:t>Sbírej u dveří. Zajímá tě zdůvodnění, ne který soubor vybrali.</a:t>
+            </a:r>
+          </a:p>
+          <a:p/>
+          <a:p>
+            <a:r>
+              <a:t>OČEKÁVANÁ ODPOVĚĎ</a:t>
+            </a:r>
+          </a:p>
+          <a:p>
+            <a:r>
+              <a:t>Export s dostatečným rozlišením a nízkou kompresí, zdůvodněný účelem — časopis se tiskne, takže rozhoduje počet pixelů, ne velikost souboru.</a:t>
+            </a:r>
+          </a:p>
+          <a:p>
+            <a:r>
+              <a:t>Odpověď „ten nejmenší, ať se to snadno pošle“ je typická a chybná. Připomeň hodinu 2: zmenšit lze vždycky, zvětšit už ne.</a:t>
             </a:r>
           </a:p>
         </p:txBody>

--- a/public/materialy/1L/6/Prezentace k hodinám/4. Úprava fotografie v GIMPu.pptx
+++ b/public/materialy/1L/6/Prezentace k hodinám/4. Úprava fotografie v GIMPu.pptx
@@ -513,12 +513,12 @@
           </a:p>
           <a:p>
             <a:r>
-              <a:t>Ověř, že GIMP je na všech stanicích a spustí se. První spuštění trvá dlouho, ať to nekrade čas z hodiny.</a:t>
-            </a:r>
-          </a:p>
-          <a:p>
-            <a:r>
-              <a:t>Rozbal Obrázky.zip a rozdej Úprava obrázku v GIMPu.txt. Soubor foto_original.png musí mít každý ve své vlastní kopii.</a:t>
+              <a:t>Ověř, že GIMP je na všech stanicích a spustí se. První spuštění trvá dlouho, ať to nekrade čas z hodiny.</a:t>
+            </a:r>
+          </a:p>
+          <a:p>
+            <a:r>
+              <a:t>Rozbal Obrázky.zip a rozdej Úprava obrázku v GIMPu.txt. Soubor foto_original.png musí mít každý ve své vlastní kopii.</a:t>
             </a:r>
           </a:p>
           <a:p/>
@@ -529,7 +529,7 @@
           </a:p>
           <a:p>
             <a:r>
-              <a:t>Veď hodinu jako řízenou demonstraci na projektoru a studenti zapisují postup a rozhodnutí do sešitu — tak to má i metodika. Ukázat se musí obojí: panel vrstev a rozdíl mezi uložením .xcf a exportem .jpg.</a:t>
+              <a:t>Veď hodinu jako řízenou demonstraci na projektoru a studenti zapisují postup a rozhodnutí do sešitu — tak to má i metodika. Ukázat se musí obojí: panel vrstev a rozdíl mezi uložením .xcf a exportem .jpg.</a:t>
             </a:r>
           </a:p>
           <a:p/>
@@ -540,7 +540,7 @@
           </a:p>
           <a:p>
             <a:r>
-              <a:t>Student provede základní úpravy rastrového snímku, pracuje s vrstvami a exportuje výstup ve vhodném formátu a velikosti.</a:t>
+              <a:t>Student provede základní úpravy rastrového snímku, pracuje s vrstvami a exportuje výstup ve vhodném formátu a velikosti.</a:t>
             </a:r>
           </a:p>
           <a:p/>
@@ -551,7 +551,7 @@
           </a:p>
           <a:p>
             <a:r>
-              <a:t>Soubor uprava.xcf, tři exporty a tabulka s rozměry, velikostmi a účelem.</a:t>
+              <a:t>Soubor uprava.xcf, tři exporty a tabulka s rozměry, velikostmi a účelem.</a:t>
             </a:r>
           </a:p>
           <a:p/>
@@ -562,7 +562,7 @@
           </a:p>
           <a:p>
             <a:r>
-              <a:t>5 min otázka · 7 min ukázka · 28 min práce · 5 min rozbor a exit ticket.</a:t>
+              <a:t>5 min otázka · 7 min ukázka · 28 min práce · 5 min rozbor a exit ticket.</a:t>
             </a:r>
           </a:p>
         </p:txBody>
@@ -643,7 +643,7 @@
           </a:p>
           <a:p>
             <a:r>
-              <a:t>„Každý grafický program vás nutí ukládat dva soubory: pracovní a výsledný. Proč? Napište si jednu vlastnost, o kterou přijdete, když uložíte rovnou do JPEG.“</a:t>
+              <a:t>„Každý grafický program vás nutí ukládat dva soubory: pracovní a výsledný. Proč? Napište si jednu vlastnost, o kterou přijdete, když uložíte rovnou do JPEG.“</a:t>
             </a:r>
           </a:p>
           <a:p/>
@@ -654,12 +654,12 @@
           </a:p>
           <a:p>
             <a:r>
-              <a:t>Nechej odpovědi zapsané a nekomentuj je. Na konci hodiny si je studenti sami zkontrolují — do té doby si na ztrátu vrstev sáhnou.</a:t>
-            </a:r>
-          </a:p>
-          <a:p>
-            <a:r>
-              <a:t>Kdo napíše „kvalitu“, má pravdu jen z poloviny. Hlavní ztráta je, že se vrstvy slijí do jednoho obrazu.</a:t>
+              <a:t>Nechej odpovědi zapsané a nekomentuj je. Na konci hodiny si je studenti sami zkontrolují — do té doby si na ztrátu vrstev sáhnou.</a:t>
+            </a:r>
+          </a:p>
+          <a:p>
+            <a:r>
+              <a:t>Kdo napíše „kvalitu“, má pravdu jen z poloviny. Hlavní ztráta je, že se vrstvy slijí do jednoho obrazu.</a:t>
             </a:r>
           </a:p>
           <a:p/>
@@ -670,7 +670,7 @@
           </a:p>
           <a:p>
             <a:r>
-              <a:t>Neodpovídej. Tahle hodina má jedinou skutečnou pointu a ta se musí ukázat, ne říct.</a:t>
+              <a:t>Neodpovídej. Tahle hodina má jedinou skutečnou pointu a ta se musí ukázat, ne říct.</a:t>
             </a:r>
           </a:p>
         </p:txBody>
@@ -740,7 +740,7 @@
           <a:lstStyle/>
           <a:p>
             <a:r>
-              <a:t>Čas: 5–12 minut. Sedm minut je strop a část z nich ukazuj přímo v GIMPu na projektoru.</a:t>
+              <a:t>Čas: 5–12 minut. Sedm minut je strop a část z nich ukazuj přímo v GIMPu na projektoru.</a:t>
             </a:r>
           </a:p>
           <a:p/>
@@ -751,22 +751,22 @@
           </a:p>
           <a:p>
             <a:r>
-              <a:t>K bodu 01: „Vrstvy si představte jako průhledné fólie položené na sebe. Text je na jedné, fotka na druhé. Dokud jsou oddělené, můžete kteroukoli z nich posunout nebo smazat, aniž byste sáhli na ostatní.“</a:t>
-            </a:r>
-          </a:p>
-          <a:p>
-            <a:r>
-              <a:t>K bodu 02: „Pracovní soubor .xcf si ty fólie pamatuje. Export do JPEG je slije do jednoho obrazu — a to je jednosměrná cesta. Z JPEGu vrstvy nikdo nevytáhne.“</a:t>
-            </a:r>
-          </a:p>
-          <a:p>
-            <a:r>
-              <a:t>K bodu 03: „Export není ukládání. Je to rozhodnutí, kam obrázek půjde: jaký formát, jaký rozměr, jaká kvalita.“</a:t>
-            </a:r>
-          </a:p>
-          <a:p>
-            <a:r>
-              <a:t>Závěr: „A jedno pravidlo, které platí ve všech programech: původní soubor nikdy nepřepisujte. Upravujte kopii.“</a:t>
+              <a:t>K bodu 01: „Vrstvy si představte jako průhledné fólie položené na sebe. Text je na jedné, fotka na druhé. Dokud jsou oddělené, můžete kteroukoli z nich posunout nebo smazat, aniž byste sáhli na ostatní.“</a:t>
+            </a:r>
+          </a:p>
+          <a:p>
+            <a:r>
+              <a:t>K bodu 02: „Pracovní soubor .xcf si ty fólie pamatuje. Export do JPEG je slije do jednoho obrazu — a to je jednosměrná cesta. Z JPEGu vrstvy nikdo nevytáhne.“</a:t>
+            </a:r>
+          </a:p>
+          <a:p>
+            <a:r>
+              <a:t>K bodu 03: „Export není ukládání. Je to rozhodnutí, kam obrázek půjde: jaký formát, jaký rozměr, jaká kvalita.“</a:t>
+            </a:r>
+          </a:p>
+          <a:p>
+            <a:r>
+              <a:t>Závěr: „A jedno pravidlo, které platí ve všech programech: původní soubor nikdy nepřepisujte. Upravujte kopii.“</a:t>
             </a:r>
           </a:p>
           <a:p/>
@@ -777,7 +777,7 @@
           </a:p>
           <a:p>
             <a:r>
-              <a:t>Ukaž na projektoru dvě věci a nic víc: jak vypadá panel vrstev, a kde je rozdíl mezi Uložit jako (.xcf) a Exportovat jako (.jpg). Právě tohle studenti nejčastěji spletou.</a:t>
+              <a:t>Ukaž na projektoru dvě věci a nic víc: jak vypadá panel vrstev, a kde je rozdíl mezi Uložit jako (.xcf) a Exportovat jako (.jpg). Právě tohle studenti nejčastěji spletou.</a:t>
             </a:r>
           </a:p>
           <a:p/>
@@ -788,7 +788,7 @@
           </a:p>
           <a:p>
             <a:r>
-              <a:t>Neuč GIMP jako program. Nástroje najdou sami, hodina je o postupu — nedestruktivní práce a vědomý export.</a:t>
+              <a:t>Neuč GIMP jako program. Nástroje najdou sami, hodina je o postupu — nedestruktivní práce a vědomý export.</a:t>
             </a:r>
           </a:p>
         </p:txBody>
@@ -858,7 +858,7 @@
           <a:lstStyle/>
           <a:p>
             <a:r>
-              <a:t>Čas: 12–40 minut. Nejvíc dotazů přijde v prvních pěti minutách, počítej s tím.</a:t>
+              <a:t>Čas: 12–40 minut. Nejvíc dotazů přijde v prvních pěti minutách, počítej s tím.</a:t>
             </a:r>
           </a:p>
           <a:p/>
@@ -869,39 +869,39 @@
           </a:p>
           <a:p>
             <a:r>
-              <a:t>„Otevřete si svou kopii foto_original.png a pracovní list. Postup je v něm krok za krokem. Do dvaceti minut chci mít ořez a jas, pak jdeme na text.“</a:t>
+              <a:t>„Otevřete si svou kopii foto_original.png a pracovní list. Postup je v něm krok za krokem. Do dvaceti minut chci mít ořez a jas, pak jdeme na text.“</a:t>
             </a:r>
           </a:p>
           <a:p/>
           <a:p>
             <a:r>
-              <a:t>12–20 MIN · OŘEZ A TONÁLNÍ ÚPRAVA</a:t>
-            </a:r>
-          </a:p>
-          <a:p>
-            <a:r>
-              <a:t>Ořez na poměr 16:9 a úprava jasu a kontrastu. Trvej na tom, aby si zapsali použité hodnoty — bez toho se úprava nedá zopakovat ani obhájit.</a:t>
-            </a:r>
-          </a:p>
-          <a:p>
-            <a:r>
-              <a:t>Obcházej a hlídej jedinou věc: jestli někdo nepřepisuje originál. Kdo to udělá, dostane novou kopii ze ZIPu a je to dobrá připomínka, ne trest.</a:t>
+              <a:t>12–20 MIN · OŘEZ A TONÁLNÍ ÚPRAVA</a:t>
+            </a:r>
+          </a:p>
+          <a:p>
+            <a:r>
+              <a:t>Ořez na poměr 16:9 a úprava jasu a kontrastu. Trvej na tom, aby si zapsali použité hodnoty — bez toho se úprava nedá zopakovat ani obhájit.</a:t>
+            </a:r>
+          </a:p>
+          <a:p>
+            <a:r>
+              <a:t>Obcházej a hlídej jedinou věc: jestli někdo nepřepisuje originál. Kdo to udělá, dostane novou kopii ze ZIPu a je to dobrá připomínka, ne trest.</a:t>
             </a:r>
           </a:p>
           <a:p/>
           <a:p>
             <a:r>
-              <a:t>20–30 MIN · TEXTOVÁ VRSTVA A ULOŽENÍ .XCF</a:t>
-            </a:r>
-          </a:p>
-          <a:p>
-            <a:r>
-              <a:t>Přidají textovou vrstvu a uloží pracovní verzi jako uprava.xcf.</a:t>
-            </a:r>
-          </a:p>
-          <a:p>
-            <a:r>
-              <a:t>Tady se odehraje pointa hodiny. Až budou mít .xcf, řekni: „Teď zavřete GIMP, otevřete svůj export a zkuste ten text posunout.“ Nejde to. Otevřou .xcf a jde to. Nechej to chvíli působit.</a:t>
+              <a:t>20–30 MIN · TEXTOVÁ VRSTVA A ULOŽENÍ .XCF</a:t>
+            </a:r>
+          </a:p>
+          <a:p>
+            <a:r>
+              <a:t>Přidají textovou vrstvu a uloží pracovní verzi jako uprava.xcf.</a:t>
+            </a:r>
+          </a:p>
+          <a:p>
+            <a:r>
+              <a:t>Tady se odehraje pointa hodiny. Až budou mít .xcf, řekni: „Teď zavřete GIMP, otevřete svůj export a zkuste ten text posunout.“ Nejde to. Otevřou .xcf a jde to. Nechej to chvíli působit.</a:t>
             </a:r>
           </a:p>
           <a:p/>
@@ -912,12 +912,12 @@
           </a:p>
           <a:p>
             <a:r>
-              <a:t>export_web.jpg, export_tisk.png a export_maly.jpg podle zadání. U každého zapíšou rozměry v pixelech, velikost v kB a účel.</a:t>
-            </a:r>
-          </a:p>
-          <a:p>
-            <a:r>
-              <a:t>Ptej se u tabule: „Který z těch tří pošleš do časopisu a který na web školy?“ Ať zdůvodní účelem, ne velikostí.</a:t>
+              <a:t>export_web.jpg, export_tisk.png a export_maly.jpg podle zadání. U každého zapíšou rozměry v pixelech, velikost v kB a účel.</a:t>
+            </a:r>
+          </a:p>
+          <a:p>
+            <a:r>
+              <a:t>Ptej se u tabule: „Který z těch tří pošleš do časopisu a který na web školy?“ Ať zdůvodní účelem, ne velikostí.</a:t>
             </a:r>
           </a:p>
           <a:p/>
@@ -928,7 +928,7 @@
           </a:p>
           <a:p>
             <a:r>
-              <a:t>Soubor uprava.xcf, tři exporty a tabulka s rozměry, velikostmi a účelem.</a:t>
+              <a:t>Soubor uprava.xcf, tři exporty a tabulka s rozměry, velikostmi a účelem.</a:t>
             </a:r>
           </a:p>
           <a:p/>
@@ -939,7 +939,7 @@
           </a:p>
           <a:p>
             <a:r>
-              <a:t>Vynech export_maly.jpg. Dvojice web a tisk stačí na to, aby byl rozdíl vidět.</a:t>
+              <a:t>Vynech export_maly.jpg. Dvojice web a tisk stačí na to, aby byl rozdíl vidět.</a:t>
             </a:r>
           </a:p>
         </p:txBody>
@@ -1020,7 +1020,7 @@
           </a:p>
           <a:p>
             <a:r>
-              <a:t>„Než odevzdáte, projedeme čtyři věci. Odškrtávejte si je.“ Čti body nahlas a mezi nimi nech pauzu.</a:t>
+              <a:t>„Než odevzdáte, projedeme čtyři věci. Odškrtávejte si je.“ Čti body nahlas a mezi nimi nech pauzu.</a:t>
             </a:r>
           </a:p>
           <a:p/>
@@ -1031,7 +1031,7 @@
           </a:p>
           <a:p>
             <a:r>
-              <a:t>První bod ověř namátkou sám: otevři dvěma studentům složku a podívej se na datum změny u foto_original.png. Přepsaný originál je nejčastější chyba téhle hodiny.</a:t>
+              <a:t>První bod ověř namátkou sám: otevři dvěma studentům složku a podívej se na datum změny u foto_original.png. Přepsaný originál je nejčastější chyba téhle hodiny.</a:t>
             </a:r>
           </a:p>
           <a:p/>
@@ -1123,17 +1123,17 @@
           </a:p>
           <a:p>
             <a:r>
-              <a:t>Vrať se k úvodní otázce: „Na začátku jste psali, o co přijdete při uložení do JPEG. Kdo to má napsané správně?“</a:t>
-            </a:r>
-          </a:p>
-          <a:p>
-            <a:r>
-              <a:t>Očekávaná odpověď je „o vrstvy“, ne jen „o kvalitu“. Kdo napsal kvalitu, má pravdu z poloviny.</a:t>
-            </a:r>
-          </a:p>
-          <a:p>
-            <a:r>
-              <a:t>Pak nech studenty vyslovit čtyři závěry ze snímku a doplň jen to, co nezazní.</a:t>
+              <a:t>Vrať se k úvodní otázce: „Na začátku jste psali, o co přijdete při uložení do JPEG. Kdo to má napsané správně?“</a:t>
+            </a:r>
+          </a:p>
+          <a:p>
+            <a:r>
+              <a:t>Očekávaná odpověď je „o vrstvy“, ne jen „o kvalitu“. Kdo napsal kvalitu, má pravdu z poloviny.</a:t>
+            </a:r>
+          </a:p>
+          <a:p>
+            <a:r>
+              <a:t>Pak nech studenty vyslovit čtyři závěry ze snímku a doplň jen to, co nezazní.</a:t>
             </a:r>
           </a:p>
           <a:p/>
@@ -1144,17 +1144,17 @@
           </a:p>
           <a:p>
             <a:r>
-              <a:t>Vrstvy: umožňují vracet se k rozhodnutím. Export je slije do jednoho obrazu.</a:t>
-            </a:r>
-          </a:p>
-          <a:p>
-            <a:r>
-              <a:t>Formát podle cíle: web snese menší rozměr a JPEG, tisk potřebuje plnou velikost.</a:t>
-            </a:r>
-          </a:p>
-          <a:p>
-            <a:r>
-              <a:t>Ztráta je trvalá: z exportovaného JPEGu vrstvy ani ztracený detail nezískáš.</a:t>
+              <a:t>Vrstvy: umožňují vracet se k rozhodnutím. Export je slije do jednoho obrazu.</a:t>
+            </a:r>
+          </a:p>
+          <a:p>
+            <a:r>
+              <a:t>Formát podle cíle: web snese menší rozměr a JPEG, tisk potřebuje plnou velikost.</a:t>
+            </a:r>
+          </a:p>
+          <a:p>
+            <a:r>
+              <a:t>Ztráta je trvalá: z exportovaného JPEGu vrstvy ani ztracený detail nezískáš.</a:t>
             </a:r>
           </a:p>
           <a:p>
@@ -1170,7 +1170,7 @@
           </a:p>
           <a:p>
             <a:r>
-              <a:t>Hodnoť postup a zdůvodnění, ne shodu s jednou formulací. Krásná fotka s přepsaným originálem je horší výsledek než průměrná úprava s čistým postupem.</a:t>
+              <a:t>Hodnoť postup a zdůvodnění, ne shodu s jednou formulací. Krásná fotka s přepsaným originálem je horší výsledek než průměrná úprava s čistým postupem.</a:t>
             </a:r>
           </a:p>
         </p:txBody>
@@ -1251,7 +1251,7 @@
           </a:p>
           <a:p>
             <a:r>
-              <a:t>„Každý sám, jedna dvě věty. Který ze svých tří exportů bys poslal do školního časopisu a proč právě ten?“</a:t>
+              <a:t>„Každý sám, jedna dvě věty. Který ze svých tří exportů bys poslal do školního časopisu a proč právě ten?“</a:t>
             </a:r>
           </a:p>
           <a:p/>
@@ -1262,7 +1262,7 @@
           </a:p>
           <a:p>
             <a:r>
-              <a:t>Sbírej u dveří. Zajímá tě zdůvodnění, ne který soubor vybrali.</a:t>
+              <a:t>Sbírej u dveří. Zajímá tě zdůvodnění, ne který soubor vybrali.</a:t>
             </a:r>
           </a:p>
           <a:p/>
@@ -1273,12 +1273,12 @@
           </a:p>
           <a:p>
             <a:r>
-              <a:t>Export s dostatečným rozlišením a nízkou kompresí, zdůvodněný účelem — časopis se tiskne, takže rozhoduje počet pixelů, ne velikost souboru.</a:t>
-            </a:r>
-          </a:p>
-          <a:p>
-            <a:r>
-              <a:t>Odpověď „ten nejmenší, ať se to snadno pošle“ je typická a chybná. Připomeň hodinu 2: zmenšit lze vždycky, zvětšit už ne.</a:t>
+              <a:t>Export s dostatečným rozlišením a nízkou kompresí, zdůvodněný účelem — časopis se tiskne, takže rozhoduje počet pixelů, ne velikost souboru.</a:t>
+            </a:r>
+          </a:p>
+          <a:p>
+            <a:r>
+              <a:t>Odpověď „ten nejmenší, ať se to snadno pošle“ je typická a chybná. Připomeň hodinu 2: zmenšit lze vždycky, zvětšit už ne.</a:t>
             </a:r>
           </a:p>
         </p:txBody>
@@ -4476,7 +4476,7 @@
                 </a:solidFill>
                 <a:latin typeface="Calibri"/>
               </a:rPr>
-              <a:t>Úprava fotografie v GIMPu</a:t>
+              <a:t>Úprava fotografie v GIMPu</a:t>
             </a:r>
           </a:p>
         </p:txBody>
@@ -4515,7 +4515,7 @@
                 </a:solidFill>
                 <a:latin typeface="Calibri"/>
               </a:rPr>
-              <a:t>Student provede základní úpravy rastrového snímku, pracuje s vrstvami a exportuje výstup ve vhodném formátu a velikosti.</a:t>
+              <a:t>Student provede základní úpravy rastrového snímku, pracuje s vrstvami a exportuje výstup ve vhodném formátu a velikosti.</a:t>
             </a:r>
           </a:p>
         </p:txBody>
@@ -4840,7 +4840,7 @@
                 </a:solidFill>
                 <a:latin typeface="Calibri"/>
               </a:rPr>
-              <a:t>POČÍTAČOVÁ GRAFIKA A PRÁCE S MULTIMÉDII</a:t>
+              <a:t>POČÍTAČOVÁ GRAFIKA A PRÁCE S MULTIMÉDII</a:t>
             </a:r>
           </a:p>
         </p:txBody>
@@ -4914,7 +4914,7 @@
                 </a:solidFill>
                 <a:latin typeface="Calibri"/>
               </a:rPr>
-              <a:t>Proč se v grafických programech ukládá pracovní soubor zvlášť od výsledného obrázku?</a:t>
+              <a:t>Proč se v grafických programech ukládá pracovní soubor zvlášť od výsledného obrázku?</a:t>
             </a:r>
           </a:p>
         </p:txBody>
@@ -5062,7 +5062,7 @@
                 </a:solidFill>
                 <a:latin typeface="Calibri"/>
               </a:rPr>
-              <a:t>Jednu vlastnost, o kterou přijdeš.</a:t>
+              <a:t>Jednu vlastnost, o kterou přijdeš.</a:t>
             </a:r>
           </a:p>
         </p:txBody>
@@ -5382,7 +5382,7 @@
                 </a:solidFill>
                 <a:latin typeface="Calibri"/>
               </a:rPr>
-              <a:t>POČÍTAČOVÁ GRAFIKA A PRÁCE S MULTIMÉDII</a:t>
+              <a:t>POČÍTAČOVÁ GRAFIKA A PRÁCE S MULTIMÉDII</a:t>
             </a:r>
           </a:p>
         </p:txBody>
@@ -5570,7 +5570,7 @@
                 </a:solidFill>
                 <a:latin typeface="Calibri"/>
               </a:rPr>
-              <a:t>Nad sebou ležící průhledné fólie. Úpravy zůstávají oddělené a lze je vzít zpět.</a:t>
+              <a:t>Nad sebou ležící průhledné fólie. Úpravy zůstávají oddělené a lze je vzít zpět.</a:t>
             </a:r>
           </a:p>
         </p:txBody>
@@ -5876,7 +5876,7 @@
                 </a:solidFill>
                 <a:latin typeface="Calibri"/>
               </a:rPr>
-              <a:t>Volba formátu, rozměru a kvality podle toho, kam výstup půjde.</a:t>
+              <a:t>Volba formátu, rozměru a kvality podle toho, kam výstup půjde.</a:t>
             </a:r>
           </a:p>
         </p:txBody>
@@ -6166,7 +6166,7 @@
                 </a:solidFill>
                 <a:latin typeface="Calibri"/>
               </a:rPr>
-              <a:t>POČÍTAČOVÁ GRAFIKA A PRÁCE S MULTIMÉDII</a:t>
+              <a:t>POČÍTAČOVÁ GRAFIKA A PRÁCE S MULTIMÉDII</a:t>
             </a:r>
           </a:p>
         </p:txBody>
@@ -6271,7 +6271,7 @@
                 </a:solidFill>
                 <a:latin typeface="Calibri"/>
               </a:rPr>
-              <a:t>GIMP, Obrázky/foto_original.png, Úprava obrázku v GIMPu.txt</a:t>
+              <a:t>GIMP, Obrázky/foto_original.png, Úprava obrázku v GIMPu.txt</a:t>
             </a:r>
           </a:p>
         </p:txBody>
@@ -6341,7 +6341,7 @@
                 </a:solidFill>
                 <a:latin typeface="Calibri"/>
               </a:rPr>
-              <a:t>Ořez a úprava</a:t>
+              <a:t>Ořez a úprava</a:t>
             </a:r>
           </a:p>
         </p:txBody>
@@ -6380,7 +6380,7 @@
                 </a:solidFill>
                 <a:latin typeface="Calibri"/>
               </a:rPr>
-              <a:t>Ořízni na 16:9 a uprav jas a kontrast. Zapiš použité hodnoty.</a:t>
+              <a:t>Ořízni na 16:9 a uprav jas a kontrast. Zapiš použité hodnoty.</a:t>
             </a:r>
           </a:p>
         </p:txBody>
@@ -6450,7 +6450,7 @@
                 </a:solidFill>
                 <a:latin typeface="Calibri"/>
               </a:rPr>
-              <a:t>Vrstva s popiskem</a:t>
+              <a:t>Vrstva s popiskem</a:t>
             </a:r>
           </a:p>
         </p:txBody>
@@ -6489,7 +6489,7 @@
                 </a:solidFill>
                 <a:latin typeface="Calibri"/>
               </a:rPr>
-              <a:t>Přidej textovou vrstvu a ulož pracovní verzi jako uprava.xcf.</a:t>
+              <a:t>Přidej textovou vrstvu a ulož pracovní verzi jako uprava.xcf.</a:t>
             </a:r>
           </a:p>
         </p:txBody>
@@ -6598,7 +6598,7 @@
                 </a:solidFill>
                 <a:latin typeface="Calibri"/>
               </a:rPr>
-              <a:t>export_web.jpg, export_tisk.png a export_maly.jpg podle zadání.</a:t>
+              <a:t>export_web.jpg, export_tisk.png a export_maly.jpg podle zadání.</a:t>
             </a:r>
           </a:p>
         </p:txBody>
@@ -6712,7 +6712,7 @@
                 </a:solidFill>
                 <a:latin typeface="Calibri"/>
               </a:rPr>
-              <a:t>Soubor uprava.xcf, tři exporty a tabulka s rozměry, velikostmi a účelem.</a:t>
+              <a:t>Soubor uprava.xcf, tři exporty a tabulka s rozměry, velikostmi a účelem.</a:t>
             </a:r>
           </a:p>
         </p:txBody>
@@ -6923,7 +6923,7 @@
                 </a:solidFill>
                 <a:latin typeface="Calibri"/>
               </a:rPr>
-              <a:t>POČÍTAČOVÁ GRAFIKA A PRÁCE S MULTIMÉDII</a:t>
+              <a:t>POČÍTAČOVÁ GRAFIKA A PRÁCE S MULTIMÉDII</a:t>
             </a:r>
           </a:p>
         </p:txBody>
@@ -7106,7 +7106,7 @@
                 </a:solidFill>
                 <a:latin typeface="Calibri"/>
               </a:rPr>
-              <a:t>Máš uložený pracovní soubor .xcf s vrstvami.</a:t>
+              <a:t>Máš uložený pracovní soubor .xcf s vrstvami.</a:t>
             </a:r>
           </a:p>
         </p:txBody>
@@ -7180,7 +7180,7 @@
                 </a:solidFill>
                 <a:latin typeface="Calibri"/>
               </a:rPr>
-              <a:t>U všech tří exportů máš zapsané rozměry a velikost v kB.</a:t>
+              <a:t>U všech tří exportů máš zapsané rozměry a velikost v kB.</a:t>
             </a:r>
           </a:p>
         </p:txBody>
@@ -7254,7 +7254,7 @@
                 </a:solidFill>
                 <a:latin typeface="Calibri"/>
               </a:rPr>
-              <a:t>Umíš říct, co se stalo s vrstvami při exportu do JPEG.</a:t>
+              <a:t>Umíš říct, co se stalo s vrstvami při exportu do JPEG.</a:t>
             </a:r>
           </a:p>
         </p:txBody>
@@ -7386,7 +7386,7 @@
                 </a:solidFill>
                 <a:latin typeface="Calibri"/>
               </a:rPr>
-              <a:t>Co si z hodiny odnést</a:t>
+              <a:t>Co si z hodiny odnést</a:t>
             </a:r>
           </a:p>
         </p:txBody>
@@ -7465,7 +7465,7 @@
                 </a:solidFill>
                 <a:latin typeface="Calibri"/>
               </a:rPr>
-              <a:t>POČÍTAČOVÁ GRAFIKA A PRÁCE S MULTIMÉDII</a:t>
+              <a:t>POČÍTAČOVÁ GRAFIKA A PRÁCE S MULTIMÉDII</a:t>
             </a:r>
           </a:p>
         </p:txBody>
@@ -7574,7 +7574,7 @@
                 </a:solidFill>
                 <a:latin typeface="Calibri"/>
               </a:rPr>
-              <a:t>Umožňují vracet se k rozhodnutím. Export je slije do jednoho obrazu.</a:t>
+              <a:t>Umožňují vracet se k rozhodnutím. Export je slije do jednoho obrazu.</a:t>
             </a:r>
           </a:p>
         </p:txBody>
@@ -7692,7 +7692,7 @@
                 </a:solidFill>
                 <a:latin typeface="Calibri"/>
               </a:rPr>
-              <a:t>Web snese menší rozměr a JPEG. Tisk potřebuje plnou velikost.</a:t>
+              <a:t>Web snese menší rozměr a JPEG. Tisk potřebuje plnou velikost.</a:t>
             </a:r>
           </a:p>
         </p:txBody>
@@ -7810,7 +7810,7 @@
                 </a:solidFill>
                 <a:latin typeface="Calibri"/>
               </a:rPr>
-              <a:t>Z exportovaného JPEG už vrstvy ani ztracený detail nezískáš.</a:t>
+              <a:t>Z exportovaného JPEG už vrstvy ani ztracený detail nezískáš.</a:t>
             </a:r>
           </a:p>
         </p:txBody>
@@ -8069,7 +8069,7 @@
                 </a:solidFill>
                 <a:latin typeface="Calibri"/>
               </a:rPr>
-              <a:t>POČÍTAČOVÁ GRAFIKA A PRÁCE S MULTIMÉDII</a:t>
+              <a:t>POČÍTAČOVÁ GRAFIKA A PRÁCE S MULTIMÉDII</a:t>
             </a:r>
           </a:p>
         </p:txBody>
@@ -8178,7 +8178,7 @@
                 </a:solidFill>
                 <a:latin typeface="Calibri"/>
               </a:rPr>
-              <a:t>Který ze svých tří exportů bys poslal do školního časopisu a proč právě ten?</a:t>
+              <a:t>Který ze svých tří exportů bys poslal do školního časopisu a proč právě ten?</a:t>
             </a:r>
           </a:p>
         </p:txBody>
@@ -8292,7 +8292,7 @@
                 </a:solidFill>
                 <a:latin typeface="Calibri"/>
               </a:rPr>
-              <a:t>Očekává se export s dostatečným rozlišením a nízkou kompresí; zdůvodnění účelem, ne velikostí souboru.</a:t>
+              <a:t>Očekává se export s dostatečným rozlišením a nízkou kompresí; zdůvodnění účelem, ne velikostí souboru.</a:t>
             </a:r>
           </a:p>
         </p:txBody>
